--- a/ZEN_ZAIC_보고자료.pptx
+++ b/ZEN_ZAIC_보고자료.pptx
@@ -2985,7 +2985,7 @@
                 <a:ea typeface="Malgun Gothic" pitchFamily="34" charset="-122"/>
                 <a:cs typeface="Malgun Gothic" pitchFamily="34" charset="-120"/>
               </a:rPr>
-              <a:t>제니엘 제조사업부 사업3팀 · 2026 제2회 ZAIC  —  데모: ZEN_Manufacturing_Platform.html · 데모 영상 3:45</a:t>
+              <a:t>제니엘 제조사업부 사업3팀 · 2026 제2회 ZAIC  —  데모: ZEN_Manufacturing_Platform.html · 데모 영상 5:47</a:t>
             </a:r>
             <a:endParaRPr lang="en-US" sz="1150" dirty="0"/>
           </a:p>
